--- a/public/plans/2026-06-01.pptx
+++ b/public/plans/2026-06-01.pptx
@@ -9096,7 +9096,7 @@
                 </a:solidFill>
                 <a:latin typeface="Calibri"/>
               </a:rPr>
-              <a:t>Ages 3–5  ·  45 minute session</a:t>
+              <a:t>Ages 3–5 · 45 minute session</a:t>
             </a:r>
           </a:p>
         </p:txBody>
@@ -9313,7 +9313,7 @@
                 </a:solidFill>
                 <a:latin typeface="Calibri"/>
               </a:rPr>
-              <a:t>COACH PLAYBOOK · PRE-K &amp; K</a:t>
+              <a:t>COACH PLAYBOOK · PRE-K &amp; KINDERGARTEN</a:t>
             </a:r>
           </a:p>
         </p:txBody>
@@ -11762,7 +11762,7 @@
                 </a:solidFill>
                 <a:latin typeface="Calibri"/>
               </a:rPr>
-              <a:t>qmtk Soccer · Coach Playbook · Pre-K &amp; K</a:t>
+              <a:t>qmtk Soccer · Coach Playbook · Pre-K &amp; Kindergarten</a:t>
             </a:r>
           </a:p>
         </p:txBody>
@@ -11979,7 +11979,7 @@
                 </a:solidFill>
                 <a:latin typeface="Calibri"/>
               </a:rPr>
-              <a:t>COACH PLAYBOOK · PRE-K &amp; K</a:t>
+              <a:t>COACH PLAYBOOK · PRE-K &amp; KINDERGARTEN</a:t>
             </a:r>
           </a:p>
         </p:txBody>
@@ -14834,7 +14834,7 @@
                 </a:solidFill>
                 <a:latin typeface="Calibri"/>
               </a:rPr>
-              <a:t>qmtk Soccer · Coach Playbook · Pre-K &amp; K</a:t>
+              <a:t>qmtk Soccer · Coach Playbook · Pre-K &amp; Kindergarten</a:t>
             </a:r>
           </a:p>
         </p:txBody>
@@ -15051,7 +15051,7 @@
                 </a:solidFill>
                 <a:latin typeface="Calibri"/>
               </a:rPr>
-              <a:t>COACH PLAYBOOK · PRE-K &amp; K</a:t>
+              <a:t>COACH PLAYBOOK · PRE-K &amp; KINDERGARTEN</a:t>
             </a:r>
           </a:p>
         </p:txBody>
@@ -17712,7 +17712,7 @@
                 </a:solidFill>
                 <a:latin typeface="Calibri"/>
               </a:rPr>
-              <a:t>qmtk Soccer · Coach Playbook · Pre-K &amp; K</a:t>
+              <a:t>qmtk Soccer · Coach Playbook · Pre-K &amp; Kindergarten</a:t>
             </a:r>
           </a:p>
         </p:txBody>
@@ -17929,7 +17929,7 @@
                 </a:solidFill>
                 <a:latin typeface="Calibri"/>
               </a:rPr>
-              <a:t>COACH PLAYBOOK · PRE-K &amp; K</a:t>
+              <a:t>COACH PLAYBOOK · PRE-K &amp; KINDERGARTEN</a:t>
             </a:r>
           </a:p>
         </p:txBody>
@@ -20324,7 +20324,7 @@
                 </a:solidFill>
                 <a:latin typeface="Calibri"/>
               </a:rPr>
-              <a:t>qmtk Soccer · Coach Playbook · Pre-K &amp; K</a:t>
+              <a:t>qmtk Soccer · Coach Playbook · Pre-K &amp; Kindergarten</a:t>
             </a:r>
           </a:p>
         </p:txBody>
@@ -20654,7 +20654,7 @@
                 </a:solidFill>
                 <a:latin typeface="Calibri"/>
               </a:rPr>
-              <a:t>Ages 6–11  ·  60 minute session</a:t>
+              <a:t>Ages 6–11 · 60 minute session</a:t>
             </a:r>
           </a:p>
         </p:txBody>
